--- a/reports/Kristiansand_EPM_Status_Prognose_Tiltaksrapport.pptx
+++ b/reports/Kristiansand_EPM_Status_Prognose_Tiltaksrapport.pptx
@@ -3200,7 +3200,7 @@
               </a:defRPr>
             </a:pPr>
             <a:r>
-              <a:t>Diagnose, avviksdrivere og tiltaksprofil for Slettheia Bofellesskap og Mevold Grunnskole</a:t>
+              <a:t>Diagnose, avviksdrivere og tiltaksprofil for Kommunal Boenhet og Kommunal Skole</a:t>
             </a:r>
             <a:br/>
             <a:r>
@@ -4559,7 +4559,7 @@
                         </a:defRPr>
                       </a:pPr>
                       <a:r>
-                        <a:t>Slettheia Bofellesskap (Helse)</a:t>
+                        <a:t>Kommunal Boenhet (Helse)</a:t>
                       </a:r>
                     </a:p>
                   </a:txBody>
@@ -4721,7 +4721,7 @@
                         </a:defRPr>
                       </a:pPr>
                       <a:r>
-                        <a:t>Mevold Grunnskole (Oppvekst)</a:t>
+                        <a:t>Kommunal Skole (Oppvekst)</a:t>
                       </a:r>
                     </a:p>
                   </a:txBody>
@@ -5126,7 +5126,7 @@
               </a:defRPr>
             </a:pPr>
             <a:r>
-              <a:t>2. Årsakene er strukturelle og operasjonelle: Slettheia Bofellesskap er tynget av eksterne vikarbyråer og turnusovertid, mens Mevold Grunnskole har lærervikarmerforbruk.</a:t>
+              <a:t>2. Årsakene er strukturelle og operasjonelle: Kommunal Boenhet er tynget av eksterne vikarbyråer og turnusovertid, mens Kommunal Skole har lærervikarmerforbruk.</a:t>
             </a:r>
           </a:p>
           <a:p>
@@ -5209,7 +5209,7 @@
               </a:defRPr>
             </a:pPr>
             <a:r>
-              <a:t>Slettheia Bofellesskap: Status og Avviksanalyse Jan–Aug 2026</a:t>
+              <a:t>Kommunal Boenhet: Status og Avviksanalyse Jan–Aug 2026</a:t>
             </a:r>
           </a:p>
         </p:txBody>
@@ -6984,7 +6984,7 @@
               </a:defRPr>
             </a:pPr>
             <a:r>
-              <a:t>Slettheia Bofellesskap: Helårsprognose og Nødvendig Tiltaksbane</a:t>
+              <a:t>Kommunal Boenhet: Helårsprognose og Nødvendig Tiltaksbane</a:t>
             </a:r>
           </a:p>
         </p:txBody>
@@ -8490,7 +8490,7 @@
               </a:defRPr>
             </a:pPr>
             <a:r>
-              <a:t>Slettheia Bofellesskap: Månedlig Balanseringsprofil Sept–Des</a:t>
+              <a:t>Kommunal Boenhet: Månedlig Balanseringsprofil Sept–Des</a:t>
             </a:r>
           </a:p>
         </p:txBody>
@@ -9773,7 +9773,7 @@
               </a:defRPr>
             </a:pPr>
             <a:r>
-              <a:t>Mevold Grunnskole: Status og Enhetsfordeling 2. Tertial 2026</a:t>
+              <a:t>Kommunal Skole: Status og Enhetsfordeling 2. Tertial 2026</a:t>
             </a:r>
           </a:p>
         </p:txBody>
@@ -11584,7 +11584,7 @@
                         </a:defRPr>
                       </a:pPr>
                       <a:r>
-                        <a:t>TOTALT MEVOLD SKOLE</a:t>
+                        <a:t>TOTALT KOMMUNAL SKOLE</a:t>
                       </a:r>
                     </a:p>
                   </a:txBody>
@@ -11812,7 +11812,7 @@
               </a:defRPr>
             </a:pPr>
             <a:r>
-              <a:t>Mevold Grunnskole: Kontotype- og Refusjonsanalyse (Framsikt)</a:t>
+              <a:t>Kommunal Skole: Kontotype- og Refusjonsanalyse (Framsikt)</a:t>
             </a:r>
           </a:p>
         </p:txBody>
@@ -12370,7 +12370,7 @@
               </a:defRPr>
             </a:pPr>
             <a:r>
-              <a:t>Mevold Grunnskole: Helårsprognose og Tiltaksplan for Net Zero</a:t>
+              <a:t>Kommunal Skole: Helårsprognose og Tiltaksplan for Net Zero</a:t>
             </a:r>
           </a:p>
         </p:txBody>
@@ -13678,7 +13678,7 @@
                         </a:defRPr>
                       </a:pPr>
                       <a:r>
-                        <a:t>SAMLET TILTAKSEFFEKT MEVOLD GRUNNSKOLE (T3)</a:t>
+                        <a:t>SAMLET TILTAKSEFFEKT KOMMUNAL SKOLE (T3)</a:t>
                       </a:r>
                     </a:p>
                   </a:txBody>
@@ -14029,7 +14029,7 @@
               </a:defRPr>
             </a:pPr>
             <a:r>
-              <a:t>Slettheia + Mevold</a:t>
+              <a:t>Kommunal Boenhet + Kommunal Skole</a:t>
             </a:r>
           </a:p>
         </p:txBody>
@@ -14423,7 +14423,7 @@
                         </a:defRPr>
                       </a:pPr>
                       <a:r>
-                        <a:t>Slettheia Bofellesskap</a:t>
+                        <a:t>Kommunal Boenhet</a:t>
                       </a:r>
                     </a:p>
                   </a:txBody>
@@ -14444,7 +14444,7 @@
                         </a:defRPr>
                       </a:pPr>
                       <a:r>
-                        <a:t>Mevold Grunnskole</a:t>
+                        <a:t>Kommunal Skole</a:t>
                       </a:r>
                     </a:p>
                   </a:txBody>
